--- a/slides/synchronization_part_2.pptx
+++ b/slides/synchronization_part_2.pptx
@@ -477,7 +477,7 @@
           <a:p>
             <a:fld id="{B9670FC7-431C-3445-825C-360F18AD9FB0}" type="datetimeFigureOut">
               <a:rPr lang="en-US" smtClean="0"/>
-              <a:t>9/22/25</a:t>
+              <a:t>7/14/26</a:t>
             </a:fld>
             <a:endParaRPr lang="en-US"/>
           </a:p>
@@ -5305,11 +5305,10 @@
           <a:bodyPr/>
           <a:lstStyle/>
           <a:p>
-            <a:fld id="{7C6BA8F2-30B6-AE4E-9B91-9A13A515A289}" type="datetime1">
-              <a:rPr lang="sv-SE" smtClean="0"/>
-              <a:t>2025-09-22</a:t>
-            </a:fld>
-            <a:endParaRPr lang="en-US"/>
+            <a:r>
+              <a:rPr lang="en-US"/>
+              <a:t>Vincenzo Gulisano</a:t>
+            </a:r>
           </a:p>
         </p:txBody>
       </p:sp>
@@ -5334,7 +5333,10 @@
           <a:bodyPr/>
           <a:lstStyle/>
           <a:p>
-            <a:endParaRPr lang="en-US"/>
+            <a:r>
+              <a:rPr lang="en-US"/>
+              <a:t>Operating Systems - Lecture 2 - Processes</a:t>
+            </a:r>
           </a:p>
         </p:txBody>
       </p:sp>
@@ -5505,11 +5507,10 @@
           <a:bodyPr/>
           <a:lstStyle/>
           <a:p>
-            <a:fld id="{75524CF2-252F-7E44-BA69-CCCF4BE9B4D9}" type="datetime1">
-              <a:rPr lang="sv-SE" smtClean="0"/>
-              <a:t>2025-09-22</a:t>
-            </a:fld>
-            <a:endParaRPr lang="en-US"/>
+            <a:r>
+              <a:rPr lang="en-US"/>
+              <a:t>Vincenzo Gulisano</a:t>
+            </a:r>
           </a:p>
         </p:txBody>
       </p:sp>
@@ -5534,7 +5535,10 @@
           <a:bodyPr/>
           <a:lstStyle/>
           <a:p>
-            <a:endParaRPr lang="en-US"/>
+            <a:r>
+              <a:rPr lang="en-US"/>
+              <a:t>Operating Systems - Lecture 2 - Processes</a:t>
+            </a:r>
           </a:p>
         </p:txBody>
       </p:sp>
@@ -5715,11 +5719,10 @@
           <a:bodyPr/>
           <a:lstStyle/>
           <a:p>
-            <a:fld id="{962D2DFE-CDAC-8D43-A4C5-C56A13BCF35F}" type="datetime1">
-              <a:rPr lang="sv-SE" smtClean="0"/>
-              <a:t>2025-09-22</a:t>
-            </a:fld>
-            <a:endParaRPr lang="en-US"/>
+            <a:r>
+              <a:rPr lang="en-US"/>
+              <a:t>Vincenzo Gulisano</a:t>
+            </a:r>
           </a:p>
         </p:txBody>
       </p:sp>
@@ -5744,7 +5747,10 @@
           <a:bodyPr/>
           <a:lstStyle/>
           <a:p>
-            <a:endParaRPr lang="en-US"/>
+            <a:r>
+              <a:rPr lang="en-US"/>
+              <a:t>Operating Systems - Lecture 2 - Processes</a:t>
+            </a:r>
           </a:p>
         </p:txBody>
       </p:sp>
@@ -5976,11 +5982,10 @@
           <a:bodyPr/>
           <a:lstStyle/>
           <a:p>
-            <a:fld id="{2850AEF7-CAA7-D543-9D2C-D20E6DA06BB2}" type="datetime1">
-              <a:rPr lang="sv-SE" smtClean="0"/>
-              <a:t>2025-09-22</a:t>
-            </a:fld>
-            <a:endParaRPr lang="en-US"/>
+            <a:r>
+              <a:rPr lang="en-US"/>
+              <a:t>Vincenzo Gulisano</a:t>
+            </a:r>
           </a:p>
         </p:txBody>
       </p:sp>
@@ -6005,7 +6010,10 @@
           <a:bodyPr/>
           <a:lstStyle/>
           <a:p>
-            <a:endParaRPr lang="en-US"/>
+            <a:r>
+              <a:rPr lang="en-US"/>
+              <a:t>Operating Systems - Lecture 2 - Processes</a:t>
+            </a:r>
           </a:p>
         </p:txBody>
       </p:sp>
@@ -6252,11 +6260,10 @@
           <a:bodyPr/>
           <a:lstStyle/>
           <a:p>
-            <a:fld id="{C0B15EA6-8435-6E46-A5C4-E5DD2D3E412C}" type="datetime1">
-              <a:rPr lang="sv-SE" smtClean="0"/>
-              <a:t>2025-09-22</a:t>
-            </a:fld>
-            <a:endParaRPr lang="en-US"/>
+            <a:r>
+              <a:rPr lang="en-US"/>
+              <a:t>Vincenzo Gulisano</a:t>
+            </a:r>
           </a:p>
         </p:txBody>
       </p:sp>
@@ -6281,7 +6288,10 @@
           <a:bodyPr/>
           <a:lstStyle/>
           <a:p>
-            <a:endParaRPr lang="en-US"/>
+            <a:r>
+              <a:rPr lang="en-US"/>
+              <a:t>Operating Systems - Lecture 2 - Processes</a:t>
+            </a:r>
           </a:p>
         </p:txBody>
       </p:sp>
@@ -6520,11 +6530,10 @@
           <a:bodyPr/>
           <a:lstStyle/>
           <a:p>
-            <a:fld id="{3E227D9D-AF74-6540-A2D4-573507B307FA}" type="datetime1">
-              <a:rPr lang="sv-SE" smtClean="0"/>
-              <a:t>2025-09-22</a:t>
-            </a:fld>
-            <a:endParaRPr lang="en-US"/>
+            <a:r>
+              <a:rPr lang="en-US"/>
+              <a:t>Vincenzo Gulisano</a:t>
+            </a:r>
           </a:p>
         </p:txBody>
       </p:sp>
@@ -6549,7 +6558,10 @@
           <a:bodyPr/>
           <a:lstStyle/>
           <a:p>
-            <a:endParaRPr lang="en-US"/>
+            <a:r>
+              <a:rPr lang="en-US"/>
+              <a:t>Operating Systems - Lecture 2 - Processes</a:t>
+            </a:r>
           </a:p>
         </p:txBody>
       </p:sp>
@@ -6935,11 +6947,10 @@
           <a:bodyPr/>
           <a:lstStyle/>
           <a:p>
-            <a:fld id="{66C72496-612F-094B-A7BE-17F3E6009C7D}" type="datetime1">
-              <a:rPr lang="sv-SE" smtClean="0"/>
-              <a:t>2025-09-22</a:t>
-            </a:fld>
-            <a:endParaRPr lang="en-US"/>
+            <a:r>
+              <a:rPr lang="en-US"/>
+              <a:t>Vincenzo Gulisano</a:t>
+            </a:r>
           </a:p>
         </p:txBody>
       </p:sp>
@@ -6964,7 +6975,10 @@
           <a:bodyPr/>
           <a:lstStyle/>
           <a:p>
-            <a:endParaRPr lang="en-US"/>
+            <a:r>
+              <a:rPr lang="en-US"/>
+              <a:t>Operating Systems - Lecture 2 - Processes</a:t>
+            </a:r>
           </a:p>
         </p:txBody>
       </p:sp>
@@ -7077,11 +7091,10 @@
           <a:bodyPr/>
           <a:lstStyle/>
           <a:p>
-            <a:fld id="{85283B21-F1D9-C048-B544-A304ADAF613B}" type="datetime1">
-              <a:rPr lang="sv-SE" smtClean="0"/>
-              <a:t>2025-09-22</a:t>
-            </a:fld>
-            <a:endParaRPr lang="en-US"/>
+            <a:r>
+              <a:rPr lang="en-US"/>
+              <a:t>Vincenzo Gulisano</a:t>
+            </a:r>
           </a:p>
         </p:txBody>
       </p:sp>
@@ -7106,7 +7119,10 @@
           <a:bodyPr/>
           <a:lstStyle/>
           <a:p>
-            <a:endParaRPr lang="en-US"/>
+            <a:r>
+              <a:rPr lang="en-US"/>
+              <a:t>Operating Systems - Lecture 2 - Processes</a:t>
+            </a:r>
           </a:p>
         </p:txBody>
       </p:sp>
@@ -7190,11 +7206,10 @@
           <a:bodyPr/>
           <a:lstStyle/>
           <a:p>
-            <a:fld id="{B5ED475F-17D8-BA43-85B7-E44FB374ADC6}" type="datetime1">
-              <a:rPr lang="sv-SE" smtClean="0"/>
-              <a:t>2025-09-22</a:t>
-            </a:fld>
-            <a:endParaRPr lang="en-US"/>
+            <a:r>
+              <a:rPr lang="en-US"/>
+              <a:t>Vincenzo Gulisano</a:t>
+            </a:r>
           </a:p>
         </p:txBody>
       </p:sp>
@@ -7219,7 +7234,10 @@
           <a:bodyPr/>
           <a:lstStyle/>
           <a:p>
-            <a:endParaRPr lang="en-US"/>
+            <a:r>
+              <a:rPr lang="en-US"/>
+              <a:t>Operating Systems - Lecture 2 - Processes</a:t>
+            </a:r>
           </a:p>
         </p:txBody>
       </p:sp>
@@ -7503,11 +7521,10 @@
           <a:bodyPr/>
           <a:lstStyle/>
           <a:p>
-            <a:fld id="{F86DD276-6826-544D-A4EC-066A3844324E}" type="datetime1">
-              <a:rPr lang="sv-SE" smtClean="0"/>
-              <a:t>2025-09-22</a:t>
-            </a:fld>
-            <a:endParaRPr lang="en-US"/>
+            <a:r>
+              <a:rPr lang="en-US"/>
+              <a:t>Vincenzo Gulisano</a:t>
+            </a:r>
           </a:p>
         </p:txBody>
       </p:sp>
@@ -7532,7 +7549,10 @@
           <a:bodyPr/>
           <a:lstStyle/>
           <a:p>
-            <a:endParaRPr lang="en-US"/>
+            <a:r>
+              <a:rPr lang="en-US"/>
+              <a:t>Operating Systems - Lecture 2 - Processes</a:t>
+            </a:r>
           </a:p>
         </p:txBody>
       </p:sp>
@@ -7792,11 +7812,10 @@
           <a:bodyPr/>
           <a:lstStyle/>
           <a:p>
-            <a:fld id="{8C92914D-C68F-734B-98F3-4D3553CF7A0E}" type="datetime1">
-              <a:rPr lang="sv-SE" smtClean="0"/>
-              <a:t>2025-09-22</a:t>
-            </a:fld>
-            <a:endParaRPr lang="en-US"/>
+            <a:r>
+              <a:rPr lang="en-US"/>
+              <a:t>Vincenzo Gulisano</a:t>
+            </a:r>
           </a:p>
         </p:txBody>
       </p:sp>
@@ -7821,7 +7840,10 @@
           <a:bodyPr/>
           <a:lstStyle/>
           <a:p>
-            <a:endParaRPr lang="en-US"/>
+            <a:r>
+              <a:rPr lang="en-US"/>
+              <a:t>Operating Systems - Lecture 2 - Processes</a:t>
+            </a:r>
           </a:p>
         </p:txBody>
       </p:sp>
@@ -8035,11 +8057,10 @@
             </a:lvl1pPr>
           </a:lstStyle>
           <a:p>
-            <a:fld id="{AC9AF339-3F24-CA45-A6A2-58C3DCEB7B54}" type="datetime1">
-              <a:rPr lang="sv-SE" smtClean="0"/>
-              <a:t>2025-09-22</a:t>
-            </a:fld>
-            <a:endParaRPr lang="en-US"/>
+            <a:r>
+              <a:rPr lang="en-US"/>
+              <a:t>Vincenzo Gulisano</a:t>
+            </a:r>
           </a:p>
         </p:txBody>
       </p:sp>
@@ -8082,7 +8103,10 @@
             </a:lvl1pPr>
           </a:lstStyle>
           <a:p>
-            <a:endParaRPr lang="en-US"/>
+            <a:r>
+              <a:rPr lang="en-US"/>
+              <a:t>Operating Systems - Lecture 2 - Processes</a:t>
+            </a:r>
           </a:p>
         </p:txBody>
       </p:sp>
@@ -8155,7 +8179,7 @@
     <p:sldLayoutId id="2147483659" r:id="rId11"/>
     <p:sldLayoutId id="2147483660" r:id="rId12"/>
   </p:sldLayoutIdLst>
-  <p:hf hdr="0" ftr="0" dt="0"/>
+  <p:hf hdr="0" ftr="0"/>
   <p:txStyles>
     <p:titleStyle>
       <a:lvl1pPr algn="l" defTabSz="914400" rtl="0" eaLnBrk="1" latinLnBrk="0" hangingPunct="1">
@@ -8510,88 +8534,104 @@
           </a:p>
         </p:txBody>
       </p:sp>
-      <p:pic>
-        <p:nvPicPr>
-          <p:cNvPr id="3078" name="Picture 6" descr="http://upload.wikimedia.org/wikipedia/en/5/5c/Chalmers_logo.png"/>
-          <p:cNvPicPr>
-            <a:picLocks noChangeAspect="1" noChangeArrowheads="1"/>
-          </p:cNvPicPr>
-          <p:nvPr/>
-        </p:nvPicPr>
-        <p:blipFill>
-          <a:blip r:embed="rId3">
+      <p:grpSp>
+        <p:nvGrpSpPr>
+          <p:cNvPr id="2" name="Group 1">
             <a:extLst>
-              <a:ext uri="{28A0092B-C50C-407E-A947-70E740481C1C}">
-                <a14:useLocalDpi xmlns:a14="http://schemas.microsoft.com/office/drawing/2010/main" val="0"/>
+              <a:ext uri="{FF2B5EF4-FFF2-40B4-BE49-F238E27FC236}">
+                <a16:creationId xmlns:a16="http://schemas.microsoft.com/office/drawing/2014/main" id="{DE77F173-1DA6-4223-61E1-FEDFE24BD549}"/>
               </a:ext>
             </a:extLst>
-          </a:blip>
-          <a:srcRect/>
-          <a:stretch>
-            <a:fillRect/>
-          </a:stretch>
-        </p:blipFill>
-        <p:spPr bwMode="auto">
+          </p:cNvPr>
+          <p:cNvGrpSpPr/>
+          <p:nvPr/>
+        </p:nvGrpSpPr>
+        <p:grpSpPr>
           <a:xfrm>
-            <a:off x="4100831" y="4512849"/>
-            <a:ext cx="1880870" cy="1747712"/>
+            <a:off x="2543614" y="4659360"/>
+            <a:ext cx="7104771" cy="1547400"/>
+            <a:chOff x="777241" y="4793437"/>
+            <a:chExt cx="7104771" cy="1547400"/>
           </a:xfrm>
-          <a:prstGeom prst="rect">
-            <a:avLst/>
-          </a:prstGeom>
-          <a:noFill/>
-          <a:extLst>
-            <a:ext uri="{909E8E84-426E-40DD-AFC4-6F175D3DCCD1}">
-              <a14:hiddenFill xmlns:a14="http://schemas.microsoft.com/office/drawing/2010/main">
-                <a:solidFill>
-                  <a:srgbClr val="FFFFFF"/>
-                </a:solidFill>
-              </a14:hiddenFill>
-            </a:ext>
-          </a:extLst>
-        </p:spPr>
-      </p:pic>
-      <p:pic>
-        <p:nvPicPr>
-          <p:cNvPr id="3080" name="Picture 8" descr="http://sgroup.be/sites/default/files/LOGUeng_cen2r.gif"/>
-          <p:cNvPicPr>
-            <a:picLocks noChangeAspect="1" noChangeArrowheads="1"/>
-          </p:cNvPicPr>
-          <p:nvPr/>
-        </p:nvPicPr>
-        <p:blipFill>
-          <a:blip r:embed="rId4">
+        </p:grpSpPr>
+        <p:pic>
+          <p:nvPicPr>
+            <p:cNvPr id="3" name="Picture 2">
+              <a:extLst>
+                <a:ext uri="{FF2B5EF4-FFF2-40B4-BE49-F238E27FC236}">
+                  <a16:creationId xmlns:a16="http://schemas.microsoft.com/office/drawing/2014/main" id="{3D79F06A-3449-CCAB-D741-749395BD7373}"/>
+                </a:ext>
+              </a:extLst>
+            </p:cNvPr>
+            <p:cNvPicPr>
+              <a:picLocks noChangeAspect="1" noChangeArrowheads="1"/>
+            </p:cNvPicPr>
+            <p:nvPr/>
+          </p:nvPicPr>
+          <p:blipFill>
+            <a:blip r:embed="rId3">
+              <a:extLst>
+                <a:ext uri="{28A0092B-C50C-407E-A947-70E740481C1C}">
+                  <a14:useLocalDpi xmlns:a14="http://schemas.microsoft.com/office/drawing/2010/main" val="0"/>
+                </a:ext>
+              </a:extLst>
+            </a:blip>
+            <a:srcRect/>
+            <a:stretch>
+              <a:fillRect/>
+            </a:stretch>
+          </p:blipFill>
+          <p:spPr bwMode="auto">
+            <a:xfrm>
+              <a:off x="5803022" y="4793437"/>
+              <a:ext cx="2078990" cy="1547400"/>
+            </a:xfrm>
+            <a:prstGeom prst="rect">
+              <a:avLst/>
+            </a:prstGeom>
+            <a:noFill/>
             <a:extLst>
-              <a:ext uri="{28A0092B-C50C-407E-A947-70E740481C1C}">
-                <a14:useLocalDpi xmlns:a14="http://schemas.microsoft.com/office/drawing/2010/main" val="0"/>
+              <a:ext uri="{909E8E84-426E-40DD-AFC4-6F175D3DCCD1}">
+                <a14:hiddenFill xmlns:a14="http://schemas.microsoft.com/office/drawing/2010/main">
+                  <a:solidFill>
+                    <a:srgbClr val="FFFFFF"/>
+                  </a:solidFill>
+                </a14:hiddenFill>
               </a:ext>
             </a:extLst>
-          </a:blip>
-          <a:srcRect/>
-          <a:stretch>
-            <a:fillRect/>
-          </a:stretch>
-        </p:blipFill>
-        <p:spPr bwMode="auto">
-          <a:xfrm>
-            <a:off x="6173471" y="4613005"/>
-            <a:ext cx="2078990" cy="1547400"/>
-          </a:xfrm>
-          <a:prstGeom prst="rect">
-            <a:avLst/>
-          </a:prstGeom>
-          <a:noFill/>
-          <a:extLst>
-            <a:ext uri="{909E8E84-426E-40DD-AFC4-6F175D3DCCD1}">
-              <a14:hiddenFill xmlns:a14="http://schemas.microsoft.com/office/drawing/2010/main">
-                <a:solidFill>
-                  <a:srgbClr val="FFFFFF"/>
-                </a:solidFill>
-              </a14:hiddenFill>
-            </a:ext>
-          </a:extLst>
-        </p:spPr>
-      </p:pic>
+          </p:spPr>
+        </p:pic>
+        <p:pic>
+          <p:nvPicPr>
+            <p:cNvPr id="4" name="Picture 3">
+              <a:extLst>
+                <a:ext uri="{FF2B5EF4-FFF2-40B4-BE49-F238E27FC236}">
+                  <a16:creationId xmlns:a16="http://schemas.microsoft.com/office/drawing/2014/main" id="{42649405-C12D-D2F0-F97F-F744386C276B}"/>
+                </a:ext>
+              </a:extLst>
+            </p:cNvPr>
+            <p:cNvPicPr>
+              <a:picLocks noChangeAspect="1"/>
+            </p:cNvPicPr>
+            <p:nvPr/>
+          </p:nvPicPr>
+          <p:blipFill>
+            <a:blip r:embed="rId4"/>
+            <a:stretch>
+              <a:fillRect/>
+            </a:stretch>
+          </p:blipFill>
+          <p:spPr>
+            <a:xfrm>
+              <a:off x="777241" y="4973870"/>
+              <a:ext cx="4724632" cy="1186535"/>
+            </a:xfrm>
+            <a:prstGeom prst="rect">
+              <a:avLst/>
+            </a:prstGeom>
+          </p:spPr>
+        </p:pic>
+      </p:grpSp>
     </p:spTree>
   </p:cSld>
   <p:clrMapOvr>
@@ -9759,6 +9799,34 @@
                 </a:solidFill>
               </a:rPr>
               <a:t>)</a:t>
+            </a:r>
+          </a:p>
+        </p:txBody>
+      </p:sp>
+      <p:sp>
+        <p:nvSpPr>
+          <p:cNvPr id="2" name="Date Placeholder 1">
+            <a:extLst>
+              <a:ext uri="{FF2B5EF4-FFF2-40B4-BE49-F238E27FC236}">
+                <a16:creationId xmlns:a16="http://schemas.microsoft.com/office/drawing/2014/main" id="{C3555DD6-7959-1F1B-AF02-44BC85F2E94D}"/>
+              </a:ext>
+            </a:extLst>
+          </p:cNvPr>
+          <p:cNvSpPr>
+            <a:spLocks noGrp="1"/>
+          </p:cNvSpPr>
+          <p:nvPr>
+            <p:ph type="dt" sz="half" idx="10"/>
+          </p:nvPr>
+        </p:nvSpPr>
+        <p:spPr/>
+        <p:txBody>
+          <a:bodyPr/>
+          <a:lstStyle/>
+          <a:p>
+            <a:r>
+              <a:rPr lang="en-US"/>
+              <a:t>Vincenzo Gulisano</a:t>
             </a:r>
           </a:p>
         </p:txBody>
@@ -10087,6 +10155,34 @@
                 </a:solidFill>
               </a:rPr>
               <a:t>How can it occur?</a:t>
+            </a:r>
+          </a:p>
+        </p:txBody>
+      </p:sp>
+      <p:sp>
+        <p:nvSpPr>
+          <p:cNvPr id="5" name="Date Placeholder 4">
+            <a:extLst>
+              <a:ext uri="{FF2B5EF4-FFF2-40B4-BE49-F238E27FC236}">
+                <a16:creationId xmlns:a16="http://schemas.microsoft.com/office/drawing/2014/main" id="{B1A962EB-6415-2D3C-207D-2DDBC987551D}"/>
+              </a:ext>
+            </a:extLst>
+          </p:cNvPr>
+          <p:cNvSpPr>
+            <a:spLocks noGrp="1"/>
+          </p:cNvSpPr>
+          <p:nvPr>
+            <p:ph type="dt" sz="half" idx="10"/>
+          </p:nvPr>
+        </p:nvSpPr>
+        <p:spPr/>
+        <p:txBody>
+          <a:bodyPr/>
+          <a:lstStyle/>
+          <a:p>
+            <a:r>
+              <a:rPr lang="en-US"/>
+              <a:t>Vincenzo Gulisano</a:t>
             </a:r>
           </a:p>
         </p:txBody>
@@ -11103,6 +11199,34 @@
           </p:style>
         </p:cxnSp>
       </p:grpSp>
+      <p:sp>
+        <p:nvSpPr>
+          <p:cNvPr id="11" name="Date Placeholder 10">
+            <a:extLst>
+              <a:ext uri="{FF2B5EF4-FFF2-40B4-BE49-F238E27FC236}">
+                <a16:creationId xmlns:a16="http://schemas.microsoft.com/office/drawing/2014/main" id="{F682BBDE-879F-43C5-5997-193B562BAA56}"/>
+              </a:ext>
+            </a:extLst>
+          </p:cNvPr>
+          <p:cNvSpPr>
+            <a:spLocks noGrp="1"/>
+          </p:cNvSpPr>
+          <p:nvPr>
+            <p:ph type="dt" sz="half" idx="10"/>
+          </p:nvPr>
+        </p:nvSpPr>
+        <p:spPr/>
+        <p:txBody>
+          <a:bodyPr/>
+          <a:lstStyle/>
+          <a:p>
+            <a:r>
+              <a:rPr lang="en-US"/>
+              <a:t>Vincenzo Gulisano</a:t>
+            </a:r>
+          </a:p>
+        </p:txBody>
+      </p:sp>
     </p:spTree>
     <p:extLst>
       <p:ext uri="{BB962C8B-B14F-4D97-AF65-F5344CB8AC3E}">
@@ -12134,6 +12258,34 @@
           </p:style>
         </p:cxnSp>
       </p:grpSp>
+      <p:sp>
+        <p:nvSpPr>
+          <p:cNvPr id="11" name="Date Placeholder 10">
+            <a:extLst>
+              <a:ext uri="{FF2B5EF4-FFF2-40B4-BE49-F238E27FC236}">
+                <a16:creationId xmlns:a16="http://schemas.microsoft.com/office/drawing/2014/main" id="{9BEDDBC3-FA2B-E91A-A8B6-88C3ED9DA650}"/>
+              </a:ext>
+            </a:extLst>
+          </p:cNvPr>
+          <p:cNvSpPr>
+            <a:spLocks noGrp="1"/>
+          </p:cNvSpPr>
+          <p:nvPr>
+            <p:ph type="dt" sz="half" idx="10"/>
+          </p:nvPr>
+        </p:nvSpPr>
+        <p:spPr/>
+        <p:txBody>
+          <a:bodyPr/>
+          <a:lstStyle/>
+          <a:p>
+            <a:r>
+              <a:rPr lang="en-US"/>
+              <a:t>Vincenzo Gulisano</a:t>
+            </a:r>
+          </a:p>
+        </p:txBody>
+      </p:sp>
     </p:spTree>
     <p:extLst>
       <p:ext uri="{BB962C8B-B14F-4D97-AF65-F5344CB8AC3E}">
@@ -12361,6 +12513,34 @@
               <a:t>14</a:t>
             </a:fld>
             <a:endParaRPr lang="en-US"/>
+          </a:p>
+        </p:txBody>
+      </p:sp>
+      <p:sp>
+        <p:nvSpPr>
+          <p:cNvPr id="5" name="Date Placeholder 4">
+            <a:extLst>
+              <a:ext uri="{FF2B5EF4-FFF2-40B4-BE49-F238E27FC236}">
+                <a16:creationId xmlns:a16="http://schemas.microsoft.com/office/drawing/2014/main" id="{53AA82CF-8C75-1399-E478-23141F3D60FF}"/>
+              </a:ext>
+            </a:extLst>
+          </p:cNvPr>
+          <p:cNvSpPr>
+            <a:spLocks noGrp="1"/>
+          </p:cNvSpPr>
+          <p:nvPr>
+            <p:ph type="dt" sz="half" idx="10"/>
+          </p:nvPr>
+        </p:nvSpPr>
+        <p:spPr/>
+        <p:txBody>
+          <a:bodyPr/>
+          <a:lstStyle/>
+          <a:p>
+            <a:r>
+              <a:rPr lang="en-US"/>
+              <a:t>Vincenzo Gulisano</a:t>
+            </a:r>
           </a:p>
         </p:txBody>
       </p:sp>
@@ -13000,6 +13180,34 @@
                 </a:schemeClr>
               </a:solidFill>
             </a:endParaRPr>
+          </a:p>
+        </p:txBody>
+      </p:sp>
+      <p:sp>
+        <p:nvSpPr>
+          <p:cNvPr id="2" name="Date Placeholder 1">
+            <a:extLst>
+              <a:ext uri="{FF2B5EF4-FFF2-40B4-BE49-F238E27FC236}">
+                <a16:creationId xmlns:a16="http://schemas.microsoft.com/office/drawing/2014/main" id="{F123C00D-BE15-43B4-4955-AEBCDB7A07C8}"/>
+              </a:ext>
+            </a:extLst>
+          </p:cNvPr>
+          <p:cNvSpPr>
+            <a:spLocks noGrp="1"/>
+          </p:cNvSpPr>
+          <p:nvPr>
+            <p:ph type="dt" sz="half" idx="10"/>
+          </p:nvPr>
+        </p:nvSpPr>
+        <p:spPr/>
+        <p:txBody>
+          <a:bodyPr/>
+          <a:lstStyle/>
+          <a:p>
+            <a:r>
+              <a:rPr lang="en-US"/>
+              <a:t>Vincenzo Gulisano</a:t>
+            </a:r>
           </a:p>
         </p:txBody>
       </p:sp>
@@ -14000,6 +14208,34 @@
                 </a:schemeClr>
               </a:solidFill>
             </a:endParaRPr>
+          </a:p>
+        </p:txBody>
+      </p:sp>
+      <p:sp>
+        <p:nvSpPr>
+          <p:cNvPr id="2" name="Date Placeholder 1">
+            <a:extLst>
+              <a:ext uri="{FF2B5EF4-FFF2-40B4-BE49-F238E27FC236}">
+                <a16:creationId xmlns:a16="http://schemas.microsoft.com/office/drawing/2014/main" id="{ABBC1872-738A-9B9D-2409-34E5F40C26E3}"/>
+              </a:ext>
+            </a:extLst>
+          </p:cNvPr>
+          <p:cNvSpPr>
+            <a:spLocks noGrp="1"/>
+          </p:cNvSpPr>
+          <p:nvPr>
+            <p:ph type="dt" sz="half" idx="10"/>
+          </p:nvPr>
+        </p:nvSpPr>
+        <p:spPr/>
+        <p:txBody>
+          <a:bodyPr/>
+          <a:lstStyle/>
+          <a:p>
+            <a:r>
+              <a:rPr lang="en-US"/>
+              <a:t>Vincenzo Gulisano</a:t>
+            </a:r>
           </a:p>
         </p:txBody>
       </p:sp>
@@ -14956,6 +15192,34 @@
           </p:txBody>
         </p:sp>
       </p:grpSp>
+      <p:sp>
+        <p:nvSpPr>
+          <p:cNvPr id="2" name="Date Placeholder 1">
+            <a:extLst>
+              <a:ext uri="{FF2B5EF4-FFF2-40B4-BE49-F238E27FC236}">
+                <a16:creationId xmlns:a16="http://schemas.microsoft.com/office/drawing/2014/main" id="{1A1519C6-F27E-29FD-4108-F07E0D7CF896}"/>
+              </a:ext>
+            </a:extLst>
+          </p:cNvPr>
+          <p:cNvSpPr>
+            <a:spLocks noGrp="1"/>
+          </p:cNvSpPr>
+          <p:nvPr>
+            <p:ph type="dt" sz="half" idx="10"/>
+          </p:nvPr>
+        </p:nvSpPr>
+        <p:spPr/>
+        <p:txBody>
+          <a:bodyPr/>
+          <a:lstStyle/>
+          <a:p>
+            <a:r>
+              <a:rPr lang="en-US"/>
+              <a:t>Vincenzo Gulisano</a:t>
+            </a:r>
+          </a:p>
+        </p:txBody>
+      </p:sp>
     </p:spTree>
     <p:extLst>
       <p:ext uri="{BB962C8B-B14F-4D97-AF65-F5344CB8AC3E}">
@@ -16774,6 +17038,34 @@
           </a:p>
         </p:txBody>
       </p:sp>
+      <p:sp>
+        <p:nvSpPr>
+          <p:cNvPr id="2" name="Date Placeholder 1">
+            <a:extLst>
+              <a:ext uri="{FF2B5EF4-FFF2-40B4-BE49-F238E27FC236}">
+                <a16:creationId xmlns:a16="http://schemas.microsoft.com/office/drawing/2014/main" id="{4123AC75-16BB-9E0C-FBEF-CF3249BC58F8}"/>
+              </a:ext>
+            </a:extLst>
+          </p:cNvPr>
+          <p:cNvSpPr>
+            <a:spLocks noGrp="1"/>
+          </p:cNvSpPr>
+          <p:nvPr>
+            <p:ph type="dt" sz="half" idx="10"/>
+          </p:nvPr>
+        </p:nvSpPr>
+        <p:spPr/>
+        <p:txBody>
+          <a:bodyPr/>
+          <a:lstStyle/>
+          <a:p>
+            <a:r>
+              <a:rPr lang="en-US"/>
+              <a:t>Vincenzo Gulisano</a:t>
+            </a:r>
+          </a:p>
+        </p:txBody>
+      </p:sp>
     </p:spTree>
     <p:extLst>
       <p:ext uri="{BB962C8B-B14F-4D97-AF65-F5344CB8AC3E}">
@@ -17023,6 +17315,34 @@
           </a:p>
         </p:txBody>
       </p:sp>
+      <p:sp>
+        <p:nvSpPr>
+          <p:cNvPr id="5" name="Date Placeholder 4">
+            <a:extLst>
+              <a:ext uri="{FF2B5EF4-FFF2-40B4-BE49-F238E27FC236}">
+                <a16:creationId xmlns:a16="http://schemas.microsoft.com/office/drawing/2014/main" id="{E3556EFF-71A0-EA44-B876-C8D4AF350CEC}"/>
+              </a:ext>
+            </a:extLst>
+          </p:cNvPr>
+          <p:cNvSpPr>
+            <a:spLocks noGrp="1"/>
+          </p:cNvSpPr>
+          <p:nvPr>
+            <p:ph type="dt" sz="half" idx="10"/>
+          </p:nvPr>
+        </p:nvSpPr>
+        <p:spPr/>
+        <p:txBody>
+          <a:bodyPr/>
+          <a:lstStyle/>
+          <a:p>
+            <a:r>
+              <a:rPr lang="en-US"/>
+              <a:t>Vincenzo Gulisano</a:t>
+            </a:r>
+          </a:p>
+        </p:txBody>
+      </p:sp>
     </p:spTree>
     <p:extLst>
       <p:ext uri="{BB962C8B-B14F-4D97-AF65-F5344CB8AC3E}">
@@ -17228,31 +17548,8 @@
           <a:lstStyle/>
           <a:p>
             <a:r>
-              <a:rPr lang="sv-SE"/>
+              <a:rPr lang="en-US"/>
               <a:t>Vincenzo Gulisano</a:t>
-            </a:r>
-            <a:endParaRPr lang="en-US"/>
-          </a:p>
-        </p:txBody>
-      </p:sp>
-      <p:sp>
-        <p:nvSpPr>
-          <p:cNvPr id="5" name="Footer Placeholder 4"/>
-          <p:cNvSpPr>
-            <a:spLocks noGrp="1"/>
-          </p:cNvSpPr>
-          <p:nvPr>
-            <p:ph type="ftr" sz="quarter" idx="11"/>
-          </p:nvPr>
-        </p:nvSpPr>
-        <p:spPr/>
-        <p:txBody>
-          <a:bodyPr/>
-          <a:lstStyle/>
-          <a:p>
-            <a:r>
-              <a:rPr lang="en-US"/>
-              <a:t>Operating Systems - Lecture 2 - Processes</a:t>
             </a:r>
           </a:p>
         </p:txBody>
@@ -18457,7 +18754,7 @@
             <a:prstTxWarp prst="textNoShape">
               <a:avLst/>
             </a:prstTxWarp>
-            <a:normAutofit fontScale="77500" lnSpcReduction="20000"/>
+            <a:normAutofit fontScale="85000" lnSpcReduction="10000"/>
           </a:bodyPr>
           <a:lstStyle>
             <a:lvl1pPr algn="l" defTabSz="914400" rtl="0" eaLnBrk="1" latinLnBrk="0" hangingPunct="1">
@@ -18843,6 +19140,34 @@
               <a:t>20</a:t>
             </a:fld>
             <a:endParaRPr lang="en-US"/>
+          </a:p>
+        </p:txBody>
+      </p:sp>
+      <p:sp>
+        <p:nvSpPr>
+          <p:cNvPr id="5" name="Date Placeholder 4">
+            <a:extLst>
+              <a:ext uri="{FF2B5EF4-FFF2-40B4-BE49-F238E27FC236}">
+                <a16:creationId xmlns:a16="http://schemas.microsoft.com/office/drawing/2014/main" id="{73703DB7-B4F9-2EA7-14A9-91ED1FF0A533}"/>
+              </a:ext>
+            </a:extLst>
+          </p:cNvPr>
+          <p:cNvSpPr>
+            <a:spLocks noGrp="1"/>
+          </p:cNvSpPr>
+          <p:nvPr>
+            <p:ph type="dt" sz="half" idx="10"/>
+          </p:nvPr>
+        </p:nvSpPr>
+        <p:spPr/>
+        <p:txBody>
+          <a:bodyPr/>
+          <a:lstStyle/>
+          <a:p>
+            <a:r>
+              <a:rPr lang="en-US"/>
+              <a:t>Vincenzo Gulisano</a:t>
+            </a:r>
           </a:p>
         </p:txBody>
       </p:sp>
@@ -19136,7 +19461,7 @@
             <a:prstTxWarp prst="textNoShape">
               <a:avLst/>
             </a:prstTxWarp>
-            <a:normAutofit fontScale="77500" lnSpcReduction="20000"/>
+            <a:normAutofit fontScale="85000" lnSpcReduction="10000"/>
           </a:bodyPr>
           <a:lstStyle>
             <a:lvl1pPr algn="l" defTabSz="914400" rtl="0" eaLnBrk="1" latinLnBrk="0" hangingPunct="1">
@@ -20880,6 +21205,34 @@
           </a:fontRef>
         </p:style>
       </p:cxnSp>
+      <p:sp>
+        <p:nvSpPr>
+          <p:cNvPr id="2" name="Date Placeholder 1">
+            <a:extLst>
+              <a:ext uri="{FF2B5EF4-FFF2-40B4-BE49-F238E27FC236}">
+                <a16:creationId xmlns:a16="http://schemas.microsoft.com/office/drawing/2014/main" id="{15DDEEC4-76F4-5746-8B1D-820725B7D06D}"/>
+              </a:ext>
+            </a:extLst>
+          </p:cNvPr>
+          <p:cNvSpPr>
+            <a:spLocks noGrp="1"/>
+          </p:cNvSpPr>
+          <p:nvPr>
+            <p:ph type="dt" sz="half" idx="10"/>
+          </p:nvPr>
+        </p:nvSpPr>
+        <p:spPr/>
+        <p:txBody>
+          <a:bodyPr/>
+          <a:lstStyle/>
+          <a:p>
+            <a:r>
+              <a:rPr lang="en-US"/>
+              <a:t>Vincenzo Gulisano</a:t>
+            </a:r>
+          </a:p>
+        </p:txBody>
+      </p:sp>
     </p:spTree>
     <p:extLst>
       <p:ext uri="{BB962C8B-B14F-4D97-AF65-F5344CB8AC3E}">
@@ -20983,7 +21336,7 @@
             <a:prstTxWarp prst="textNoShape">
               <a:avLst/>
             </a:prstTxWarp>
-            <a:normAutofit fontScale="77500" lnSpcReduction="20000"/>
+            <a:normAutofit fontScale="85000" lnSpcReduction="10000"/>
           </a:bodyPr>
           <a:lstStyle>
             <a:lvl1pPr algn="l" defTabSz="914400" rtl="0" eaLnBrk="1" latinLnBrk="0" hangingPunct="1">
@@ -22723,6 +23076,34 @@
           </a:fontRef>
         </p:style>
       </p:cxnSp>
+      <p:sp>
+        <p:nvSpPr>
+          <p:cNvPr id="2" name="Date Placeholder 1">
+            <a:extLst>
+              <a:ext uri="{FF2B5EF4-FFF2-40B4-BE49-F238E27FC236}">
+                <a16:creationId xmlns:a16="http://schemas.microsoft.com/office/drawing/2014/main" id="{CBD368A5-5E28-7709-B5CC-13B2F36A469A}"/>
+              </a:ext>
+            </a:extLst>
+          </p:cNvPr>
+          <p:cNvSpPr>
+            <a:spLocks noGrp="1"/>
+          </p:cNvSpPr>
+          <p:nvPr>
+            <p:ph type="dt" sz="half" idx="10"/>
+          </p:nvPr>
+        </p:nvSpPr>
+        <p:spPr/>
+        <p:txBody>
+          <a:bodyPr/>
+          <a:lstStyle/>
+          <a:p>
+            <a:r>
+              <a:rPr lang="en-US"/>
+              <a:t>Vincenzo Gulisano</a:t>
+            </a:r>
+          </a:p>
+        </p:txBody>
+      </p:sp>
     </p:spTree>
     <p:extLst>
       <p:ext uri="{BB962C8B-B14F-4D97-AF65-F5344CB8AC3E}">
@@ -22970,6 +23351,34 @@
               <a:t>23</a:t>
             </a:fld>
             <a:endParaRPr lang="en-US"/>
+          </a:p>
+        </p:txBody>
+      </p:sp>
+      <p:sp>
+        <p:nvSpPr>
+          <p:cNvPr id="5" name="Date Placeholder 4">
+            <a:extLst>
+              <a:ext uri="{FF2B5EF4-FFF2-40B4-BE49-F238E27FC236}">
+                <a16:creationId xmlns:a16="http://schemas.microsoft.com/office/drawing/2014/main" id="{5F5096EE-981A-155A-A131-3E42362010C9}"/>
+              </a:ext>
+            </a:extLst>
+          </p:cNvPr>
+          <p:cNvSpPr>
+            <a:spLocks noGrp="1"/>
+          </p:cNvSpPr>
+          <p:nvPr>
+            <p:ph type="dt" sz="half" idx="10"/>
+          </p:nvPr>
+        </p:nvSpPr>
+        <p:spPr/>
+        <p:txBody>
+          <a:bodyPr/>
+          <a:lstStyle/>
+          <a:p>
+            <a:r>
+              <a:rPr lang="en-US"/>
+              <a:t>Vincenzo Gulisano</a:t>
+            </a:r>
           </a:p>
         </p:txBody>
       </p:sp>
@@ -24873,6 +25282,34 @@
                 <a:prstClr val="black"/>
               </a:solidFill>
             </a:endParaRPr>
+          </a:p>
+        </p:txBody>
+      </p:sp>
+      <p:sp>
+        <p:nvSpPr>
+          <p:cNvPr id="2" name="Date Placeholder 1">
+            <a:extLst>
+              <a:ext uri="{FF2B5EF4-FFF2-40B4-BE49-F238E27FC236}">
+                <a16:creationId xmlns:a16="http://schemas.microsoft.com/office/drawing/2014/main" id="{A4EB84B1-A72E-DEE0-D9A5-C4CE0407A802}"/>
+              </a:ext>
+            </a:extLst>
+          </p:cNvPr>
+          <p:cNvSpPr>
+            <a:spLocks noGrp="1"/>
+          </p:cNvSpPr>
+          <p:nvPr>
+            <p:ph type="dt" sz="half" idx="10"/>
+          </p:nvPr>
+        </p:nvSpPr>
+        <p:spPr/>
+        <p:txBody>
+          <a:bodyPr/>
+          <a:lstStyle/>
+          <a:p>
+            <a:r>
+              <a:rPr lang="en-US"/>
+              <a:t>Vincenzo Gulisano</a:t>
+            </a:r>
           </a:p>
         </p:txBody>
       </p:sp>
@@ -26203,6 +26640,34 @@
           </a:p>
         </p:txBody>
       </p:sp>
+      <p:sp>
+        <p:nvSpPr>
+          <p:cNvPr id="2" name="Date Placeholder 1">
+            <a:extLst>
+              <a:ext uri="{FF2B5EF4-FFF2-40B4-BE49-F238E27FC236}">
+                <a16:creationId xmlns:a16="http://schemas.microsoft.com/office/drawing/2014/main" id="{893E6738-B4D0-A930-6F00-6FFF8FDBFFF9}"/>
+              </a:ext>
+            </a:extLst>
+          </p:cNvPr>
+          <p:cNvSpPr>
+            <a:spLocks noGrp="1"/>
+          </p:cNvSpPr>
+          <p:nvPr>
+            <p:ph type="dt" sz="half" idx="10"/>
+          </p:nvPr>
+        </p:nvSpPr>
+        <p:spPr/>
+        <p:txBody>
+          <a:bodyPr/>
+          <a:lstStyle/>
+          <a:p>
+            <a:r>
+              <a:rPr lang="en-US"/>
+              <a:t>Vincenzo Gulisano</a:t>
+            </a:r>
+          </a:p>
+        </p:txBody>
+      </p:sp>
     </p:spTree>
     <p:extLst>
       <p:ext uri="{BB962C8B-B14F-4D97-AF65-F5344CB8AC3E}">
@@ -26430,6 +26895,34 @@
               <a:t>26</a:t>
             </a:fld>
             <a:endParaRPr lang="en-US"/>
+          </a:p>
+        </p:txBody>
+      </p:sp>
+      <p:sp>
+        <p:nvSpPr>
+          <p:cNvPr id="5" name="Date Placeholder 4">
+            <a:extLst>
+              <a:ext uri="{FF2B5EF4-FFF2-40B4-BE49-F238E27FC236}">
+                <a16:creationId xmlns:a16="http://schemas.microsoft.com/office/drawing/2014/main" id="{7DFE7C32-4A76-846B-718D-330DD7B8B07B}"/>
+              </a:ext>
+            </a:extLst>
+          </p:cNvPr>
+          <p:cNvSpPr>
+            <a:spLocks noGrp="1"/>
+          </p:cNvSpPr>
+          <p:nvPr>
+            <p:ph type="dt" sz="half" idx="10"/>
+          </p:nvPr>
+        </p:nvSpPr>
+        <p:spPr/>
+        <p:txBody>
+          <a:bodyPr/>
+          <a:lstStyle/>
+          <a:p>
+            <a:r>
+              <a:rPr lang="en-US"/>
+              <a:t>Vincenzo Gulisano</a:t>
+            </a:r>
           </a:p>
         </p:txBody>
       </p:sp>
@@ -27713,6 +28206,34 @@
           </p:spPr>
         </p:pic>
       </p:grpSp>
+      <p:sp>
+        <p:nvSpPr>
+          <p:cNvPr id="2" name="Date Placeholder 1">
+            <a:extLst>
+              <a:ext uri="{FF2B5EF4-FFF2-40B4-BE49-F238E27FC236}">
+                <a16:creationId xmlns:a16="http://schemas.microsoft.com/office/drawing/2014/main" id="{4CC7AFDA-C573-E25A-E9C1-340ABA7B8572}"/>
+              </a:ext>
+            </a:extLst>
+          </p:cNvPr>
+          <p:cNvSpPr>
+            <a:spLocks noGrp="1"/>
+          </p:cNvSpPr>
+          <p:nvPr>
+            <p:ph type="dt" sz="half" idx="10"/>
+          </p:nvPr>
+        </p:nvSpPr>
+        <p:spPr/>
+        <p:txBody>
+          <a:bodyPr/>
+          <a:lstStyle/>
+          <a:p>
+            <a:r>
+              <a:rPr lang="en-US"/>
+              <a:t>Vincenzo Gulisano</a:t>
+            </a:r>
+          </a:p>
+        </p:txBody>
+      </p:sp>
     </p:spTree>
     <p:extLst>
       <p:ext uri="{BB962C8B-B14F-4D97-AF65-F5344CB8AC3E}">
@@ -27933,6 +28454,34 @@
           </a:p>
         </p:txBody>
       </p:sp>
+      <p:sp>
+        <p:nvSpPr>
+          <p:cNvPr id="2" name="Date Placeholder 1">
+            <a:extLst>
+              <a:ext uri="{FF2B5EF4-FFF2-40B4-BE49-F238E27FC236}">
+                <a16:creationId xmlns:a16="http://schemas.microsoft.com/office/drawing/2014/main" id="{FF1B78D3-6C3E-2D4F-B22E-5A9D80765BBA}"/>
+              </a:ext>
+            </a:extLst>
+          </p:cNvPr>
+          <p:cNvSpPr>
+            <a:spLocks noGrp="1"/>
+          </p:cNvSpPr>
+          <p:nvPr>
+            <p:ph type="dt" sz="half" idx="10"/>
+          </p:nvPr>
+        </p:nvSpPr>
+        <p:spPr/>
+        <p:txBody>
+          <a:bodyPr/>
+          <a:lstStyle/>
+          <a:p>
+            <a:r>
+              <a:rPr lang="en-US"/>
+              <a:t>Vincenzo Gulisano</a:t>
+            </a:r>
+          </a:p>
+        </p:txBody>
+      </p:sp>
     </p:spTree>
     <p:extLst>
       <p:ext uri="{BB962C8B-B14F-4D97-AF65-F5344CB8AC3E}">
@@ -28160,6 +28709,34 @@
               <a:t>29</a:t>
             </a:fld>
             <a:endParaRPr lang="en-US"/>
+          </a:p>
+        </p:txBody>
+      </p:sp>
+      <p:sp>
+        <p:nvSpPr>
+          <p:cNvPr id="5" name="Date Placeholder 4">
+            <a:extLst>
+              <a:ext uri="{FF2B5EF4-FFF2-40B4-BE49-F238E27FC236}">
+                <a16:creationId xmlns:a16="http://schemas.microsoft.com/office/drawing/2014/main" id="{EB6EF133-5D9D-6206-7A6E-1FAFDBFBB656}"/>
+              </a:ext>
+            </a:extLst>
+          </p:cNvPr>
+          <p:cNvSpPr>
+            <a:spLocks noGrp="1"/>
+          </p:cNvSpPr>
+          <p:nvPr>
+            <p:ph type="dt" sz="half" idx="10"/>
+          </p:nvPr>
+        </p:nvSpPr>
+        <p:spPr/>
+        <p:txBody>
+          <a:bodyPr/>
+          <a:lstStyle/>
+          <a:p>
+            <a:r>
+              <a:rPr lang="en-US"/>
+              <a:t>Vincenzo Gulisano</a:t>
+            </a:r>
           </a:p>
         </p:txBody>
       </p:sp>
@@ -28342,6 +28919,34 @@
               <a:t>3</a:t>
             </a:fld>
             <a:endParaRPr lang="en-US"/>
+          </a:p>
+        </p:txBody>
+      </p:sp>
+      <p:sp>
+        <p:nvSpPr>
+          <p:cNvPr id="5" name="Date Placeholder 4">
+            <a:extLst>
+              <a:ext uri="{FF2B5EF4-FFF2-40B4-BE49-F238E27FC236}">
+                <a16:creationId xmlns:a16="http://schemas.microsoft.com/office/drawing/2014/main" id="{EE9225BE-C24D-D4E1-B846-CDB0100050CE}"/>
+              </a:ext>
+            </a:extLst>
+          </p:cNvPr>
+          <p:cNvSpPr>
+            <a:spLocks noGrp="1"/>
+          </p:cNvSpPr>
+          <p:nvPr>
+            <p:ph type="dt" sz="half" idx="10"/>
+          </p:nvPr>
+        </p:nvSpPr>
+        <p:spPr/>
+        <p:txBody>
+          <a:bodyPr/>
+          <a:lstStyle/>
+          <a:p>
+            <a:r>
+              <a:rPr lang="en-US"/>
+              <a:t>Vincenzo Gulisano</a:t>
+            </a:r>
           </a:p>
         </p:txBody>
       </p:sp>
@@ -28831,6 +29436,34 @@
           </a:p>
         </p:txBody>
       </p:sp>
+      <p:sp>
+        <p:nvSpPr>
+          <p:cNvPr id="6" name="Date Placeholder 5">
+            <a:extLst>
+              <a:ext uri="{FF2B5EF4-FFF2-40B4-BE49-F238E27FC236}">
+                <a16:creationId xmlns:a16="http://schemas.microsoft.com/office/drawing/2014/main" id="{CF636F78-0607-ABCF-436A-FFDF24C1D6A9}"/>
+              </a:ext>
+            </a:extLst>
+          </p:cNvPr>
+          <p:cNvSpPr>
+            <a:spLocks noGrp="1"/>
+          </p:cNvSpPr>
+          <p:nvPr>
+            <p:ph type="dt" sz="half" idx="10"/>
+          </p:nvPr>
+        </p:nvSpPr>
+        <p:spPr/>
+        <p:txBody>
+          <a:bodyPr/>
+          <a:lstStyle/>
+          <a:p>
+            <a:r>
+              <a:rPr lang="en-US"/>
+              <a:t>Vincenzo Gulisano</a:t>
+            </a:r>
+          </a:p>
+        </p:txBody>
+      </p:sp>
     </p:spTree>
     <p:extLst>
       <p:ext uri="{BB962C8B-B14F-4D97-AF65-F5344CB8AC3E}">
@@ -29867,6 +30500,34 @@
                 </a:schemeClr>
               </a:solidFill>
             </a:endParaRPr>
+          </a:p>
+        </p:txBody>
+      </p:sp>
+      <p:sp>
+        <p:nvSpPr>
+          <p:cNvPr id="3" name="Date Placeholder 2">
+            <a:extLst>
+              <a:ext uri="{FF2B5EF4-FFF2-40B4-BE49-F238E27FC236}">
+                <a16:creationId xmlns:a16="http://schemas.microsoft.com/office/drawing/2014/main" id="{7190F9AF-C188-6F44-A19C-F0030ED10D27}"/>
+              </a:ext>
+            </a:extLst>
+          </p:cNvPr>
+          <p:cNvSpPr>
+            <a:spLocks noGrp="1"/>
+          </p:cNvSpPr>
+          <p:nvPr>
+            <p:ph type="dt" sz="half" idx="10"/>
+          </p:nvPr>
+        </p:nvSpPr>
+        <p:spPr/>
+        <p:txBody>
+          <a:bodyPr/>
+          <a:lstStyle/>
+          <a:p>
+            <a:r>
+              <a:rPr lang="en-US"/>
+              <a:t>Vincenzo Gulisano</a:t>
+            </a:r>
           </a:p>
         </p:txBody>
       </p:sp>
@@ -30103,6 +30764,34 @@
               <a:t>32</a:t>
             </a:fld>
             <a:endParaRPr lang="en-US"/>
+          </a:p>
+        </p:txBody>
+      </p:sp>
+      <p:sp>
+        <p:nvSpPr>
+          <p:cNvPr id="5" name="Date Placeholder 4">
+            <a:extLst>
+              <a:ext uri="{FF2B5EF4-FFF2-40B4-BE49-F238E27FC236}">
+                <a16:creationId xmlns:a16="http://schemas.microsoft.com/office/drawing/2014/main" id="{62A92929-E084-4C23-D43D-DED649D3D9D1}"/>
+              </a:ext>
+            </a:extLst>
+          </p:cNvPr>
+          <p:cNvSpPr>
+            <a:spLocks noGrp="1"/>
+          </p:cNvSpPr>
+          <p:nvPr>
+            <p:ph type="dt" sz="half" idx="10"/>
+          </p:nvPr>
+        </p:nvSpPr>
+        <p:spPr/>
+        <p:txBody>
+          <a:bodyPr/>
+          <a:lstStyle/>
+          <a:p>
+            <a:r>
+              <a:rPr lang="en-US"/>
+              <a:t>Vincenzo Gulisano</a:t>
+            </a:r>
           </a:p>
         </p:txBody>
       </p:sp>
@@ -31075,6 +31764,34 @@
           </a:fontRef>
         </p:style>
       </p:cxnSp>
+      <p:sp>
+        <p:nvSpPr>
+          <p:cNvPr id="4" name="Date Placeholder 3">
+            <a:extLst>
+              <a:ext uri="{FF2B5EF4-FFF2-40B4-BE49-F238E27FC236}">
+                <a16:creationId xmlns:a16="http://schemas.microsoft.com/office/drawing/2014/main" id="{76890433-2114-4386-1DD5-9F6E3D8F2D54}"/>
+              </a:ext>
+            </a:extLst>
+          </p:cNvPr>
+          <p:cNvSpPr>
+            <a:spLocks noGrp="1"/>
+          </p:cNvSpPr>
+          <p:nvPr>
+            <p:ph type="dt" sz="half" idx="10"/>
+          </p:nvPr>
+        </p:nvSpPr>
+        <p:spPr/>
+        <p:txBody>
+          <a:bodyPr/>
+          <a:lstStyle/>
+          <a:p>
+            <a:r>
+              <a:rPr lang="en-US"/>
+              <a:t>Vincenzo Gulisano</a:t>
+            </a:r>
+          </a:p>
+        </p:txBody>
+      </p:sp>
     </p:spTree>
     <p:extLst>
       <p:ext uri="{BB962C8B-B14F-4D97-AF65-F5344CB8AC3E}">
@@ -31821,13 +32538,13 @@
           <p:nvPr/>
         </p:nvPicPr>
         <p:blipFill>
-          <a:blip r:embed="rId3">
+          <a:blip>
             <a:extLst>
               <a:ext uri="{28A0092B-C50C-407E-A947-70E740481C1C}">
                 <a14:useLocalDpi xmlns:a14="http://schemas.microsoft.com/office/drawing/2010/main" val="0"/>
               </a:ext>
               <a:ext uri="{96DAC541-7B7A-43D3-8B79-37D633B846F1}">
-                <asvg:svgBlip xmlns:asvg="http://schemas.microsoft.com/office/drawing/2016/SVG/main" r:embed="rId4"/>
+                <asvg:svgBlip xmlns:asvg="http://schemas.microsoft.com/office/drawing/2016/SVG/main" r:embed="rId3"/>
               </a:ext>
             </a:extLst>
           </a:blip>
@@ -31860,13 +32577,13 @@
           <p:nvPr/>
         </p:nvPicPr>
         <p:blipFill>
-          <a:blip r:embed="rId3">
+          <a:blip>
             <a:extLst>
               <a:ext uri="{28A0092B-C50C-407E-A947-70E740481C1C}">
                 <a14:useLocalDpi xmlns:a14="http://schemas.microsoft.com/office/drawing/2010/main" val="0"/>
               </a:ext>
               <a:ext uri="{96DAC541-7B7A-43D3-8B79-37D633B846F1}">
-                <asvg:svgBlip xmlns:asvg="http://schemas.microsoft.com/office/drawing/2016/SVG/main" r:embed="rId4"/>
+                <asvg:svgBlip xmlns:asvg="http://schemas.microsoft.com/office/drawing/2016/SVG/main" r:embed="rId3"/>
               </a:ext>
             </a:extLst>
           </a:blip>
@@ -32074,6 +32791,34 @@
               <a:t>j</a:t>
             </a:r>
             <a:endParaRPr lang="en-US" sz="2800" baseline="-25000" dirty="0"/>
+          </a:p>
+        </p:txBody>
+      </p:sp>
+      <p:sp>
+        <p:nvSpPr>
+          <p:cNvPr id="3" name="Date Placeholder 2">
+            <a:extLst>
+              <a:ext uri="{FF2B5EF4-FFF2-40B4-BE49-F238E27FC236}">
+                <a16:creationId xmlns:a16="http://schemas.microsoft.com/office/drawing/2014/main" id="{5E254752-67E2-50F2-D230-E477AFE5946A}"/>
+              </a:ext>
+            </a:extLst>
+          </p:cNvPr>
+          <p:cNvSpPr>
+            <a:spLocks noGrp="1"/>
+          </p:cNvSpPr>
+          <p:nvPr>
+            <p:ph type="dt" sz="half" idx="10"/>
+          </p:nvPr>
+        </p:nvSpPr>
+        <p:spPr/>
+        <p:txBody>
+          <a:bodyPr/>
+          <a:lstStyle/>
+          <a:p>
+            <a:r>
+              <a:rPr lang="en-US"/>
+              <a:t>Vincenzo Gulisano</a:t>
+            </a:r>
           </a:p>
         </p:txBody>
       </p:sp>
@@ -33304,6 +34049,34 @@
           </p:txBody>
         </p:sp>
       </p:grpSp>
+      <p:sp>
+        <p:nvSpPr>
+          <p:cNvPr id="3" name="Date Placeholder 2">
+            <a:extLst>
+              <a:ext uri="{FF2B5EF4-FFF2-40B4-BE49-F238E27FC236}">
+                <a16:creationId xmlns:a16="http://schemas.microsoft.com/office/drawing/2014/main" id="{61894EA9-CE77-5B27-110D-F6A04071C987}"/>
+              </a:ext>
+            </a:extLst>
+          </p:cNvPr>
+          <p:cNvSpPr>
+            <a:spLocks noGrp="1"/>
+          </p:cNvSpPr>
+          <p:nvPr>
+            <p:ph type="dt" sz="half" idx="10"/>
+          </p:nvPr>
+        </p:nvSpPr>
+        <p:spPr/>
+        <p:txBody>
+          <a:bodyPr/>
+          <a:lstStyle/>
+          <a:p>
+            <a:r>
+              <a:rPr lang="en-US"/>
+              <a:t>Vincenzo Gulisano</a:t>
+            </a:r>
+          </a:p>
+        </p:txBody>
+      </p:sp>
     </p:spTree>
     <p:extLst>
       <p:ext uri="{BB962C8B-B14F-4D97-AF65-F5344CB8AC3E}">
@@ -33540,6 +34313,34 @@
           </a:p>
         </p:txBody>
       </p:sp>
+      <p:sp>
+        <p:nvSpPr>
+          <p:cNvPr id="5" name="Date Placeholder 4">
+            <a:extLst>
+              <a:ext uri="{FF2B5EF4-FFF2-40B4-BE49-F238E27FC236}">
+                <a16:creationId xmlns:a16="http://schemas.microsoft.com/office/drawing/2014/main" id="{1A36B018-5FAF-A041-5713-426C989AAD47}"/>
+              </a:ext>
+            </a:extLst>
+          </p:cNvPr>
+          <p:cNvSpPr>
+            <a:spLocks noGrp="1"/>
+          </p:cNvSpPr>
+          <p:nvPr>
+            <p:ph type="dt" sz="half" idx="10"/>
+          </p:nvPr>
+        </p:nvSpPr>
+        <p:spPr/>
+        <p:txBody>
+          <a:bodyPr/>
+          <a:lstStyle/>
+          <a:p>
+            <a:r>
+              <a:rPr lang="en-US"/>
+              <a:t>Vincenzo Gulisano</a:t>
+            </a:r>
+          </a:p>
+        </p:txBody>
+      </p:sp>
     </p:spTree>
     <p:extLst>
       <p:ext uri="{BB962C8B-B14F-4D97-AF65-F5344CB8AC3E}">
@@ -33832,6 +34633,34 @@
                 </a:schemeClr>
               </a:solidFill>
             </a:endParaRPr>
+          </a:p>
+        </p:txBody>
+      </p:sp>
+      <p:sp>
+        <p:nvSpPr>
+          <p:cNvPr id="3" name="Date Placeholder 2">
+            <a:extLst>
+              <a:ext uri="{FF2B5EF4-FFF2-40B4-BE49-F238E27FC236}">
+                <a16:creationId xmlns:a16="http://schemas.microsoft.com/office/drawing/2014/main" id="{08CFBCBC-D596-F7E4-7CE2-C7AAE5AC0E03}"/>
+              </a:ext>
+            </a:extLst>
+          </p:cNvPr>
+          <p:cNvSpPr>
+            <a:spLocks noGrp="1"/>
+          </p:cNvSpPr>
+          <p:nvPr>
+            <p:ph type="dt" sz="half" idx="10"/>
+          </p:nvPr>
+        </p:nvSpPr>
+        <p:spPr/>
+        <p:txBody>
+          <a:bodyPr/>
+          <a:lstStyle/>
+          <a:p>
+            <a:r>
+              <a:rPr lang="en-US"/>
+              <a:t>Vincenzo Gulisano</a:t>
+            </a:r>
           </a:p>
         </p:txBody>
       </p:sp>
@@ -34429,6 +35258,34 @@
           </a:fontRef>
         </p:style>
       </p:cxnSp>
+      <p:sp>
+        <p:nvSpPr>
+          <p:cNvPr id="2" name="Date Placeholder 1">
+            <a:extLst>
+              <a:ext uri="{FF2B5EF4-FFF2-40B4-BE49-F238E27FC236}">
+                <a16:creationId xmlns:a16="http://schemas.microsoft.com/office/drawing/2014/main" id="{55E9F55F-BCAE-BCF6-8CDF-D3705774C5DC}"/>
+              </a:ext>
+            </a:extLst>
+          </p:cNvPr>
+          <p:cNvSpPr>
+            <a:spLocks noGrp="1"/>
+          </p:cNvSpPr>
+          <p:nvPr>
+            <p:ph type="dt" sz="half" idx="10"/>
+          </p:nvPr>
+        </p:nvSpPr>
+        <p:spPr/>
+        <p:txBody>
+          <a:bodyPr/>
+          <a:lstStyle/>
+          <a:p>
+            <a:r>
+              <a:rPr lang="en-US"/>
+              <a:t>Vincenzo Gulisano</a:t>
+            </a:r>
+          </a:p>
+        </p:txBody>
+      </p:sp>
     </p:spTree>
     <p:extLst>
       <p:ext uri="{BB962C8B-B14F-4D97-AF65-F5344CB8AC3E}">
@@ -34939,6 +35796,34 @@
           </a:p>
         </p:txBody>
       </p:sp>
+      <p:sp>
+        <p:nvSpPr>
+          <p:cNvPr id="3" name="Date Placeholder 2">
+            <a:extLst>
+              <a:ext uri="{FF2B5EF4-FFF2-40B4-BE49-F238E27FC236}">
+                <a16:creationId xmlns:a16="http://schemas.microsoft.com/office/drawing/2014/main" id="{6095D3BD-3AE4-B3E3-8469-C331AA1FDEE6}"/>
+              </a:ext>
+            </a:extLst>
+          </p:cNvPr>
+          <p:cNvSpPr>
+            <a:spLocks noGrp="1"/>
+          </p:cNvSpPr>
+          <p:nvPr>
+            <p:ph type="dt" sz="half" idx="10"/>
+          </p:nvPr>
+        </p:nvSpPr>
+        <p:spPr/>
+        <p:txBody>
+          <a:bodyPr/>
+          <a:lstStyle/>
+          <a:p>
+            <a:r>
+              <a:rPr lang="en-US"/>
+              <a:t>Vincenzo Gulisano</a:t>
+            </a:r>
+          </a:p>
+        </p:txBody>
+      </p:sp>
     </p:spTree>
     <p:extLst>
       <p:ext uri="{BB962C8B-B14F-4D97-AF65-F5344CB8AC3E}">
@@ -35172,6 +36057,34 @@
               <a:t>4</a:t>
             </a:fld>
             <a:endParaRPr lang="en-US"/>
+          </a:p>
+        </p:txBody>
+      </p:sp>
+      <p:sp>
+        <p:nvSpPr>
+          <p:cNvPr id="5" name="Date Placeholder 4">
+            <a:extLst>
+              <a:ext uri="{FF2B5EF4-FFF2-40B4-BE49-F238E27FC236}">
+                <a16:creationId xmlns:a16="http://schemas.microsoft.com/office/drawing/2014/main" id="{FD1A0A8C-BEEC-2E7A-55E0-27F5AC3E61CB}"/>
+              </a:ext>
+            </a:extLst>
+          </p:cNvPr>
+          <p:cNvSpPr>
+            <a:spLocks noGrp="1"/>
+          </p:cNvSpPr>
+          <p:nvPr>
+            <p:ph type="dt" sz="half" idx="10"/>
+          </p:nvPr>
+        </p:nvSpPr>
+        <p:spPr/>
+        <p:txBody>
+          <a:bodyPr/>
+          <a:lstStyle/>
+          <a:p>
+            <a:r>
+              <a:rPr lang="en-US"/>
+              <a:t>Vincenzo Gulisano</a:t>
+            </a:r>
           </a:p>
         </p:txBody>
       </p:sp>
@@ -35734,6 +36647,34 @@
           </p:style>
         </p:cxnSp>
       </p:grpSp>
+      <p:sp>
+        <p:nvSpPr>
+          <p:cNvPr id="3" name="Date Placeholder 2">
+            <a:extLst>
+              <a:ext uri="{FF2B5EF4-FFF2-40B4-BE49-F238E27FC236}">
+                <a16:creationId xmlns:a16="http://schemas.microsoft.com/office/drawing/2014/main" id="{B62091CA-9502-4C39-1BA0-CB454B76998F}"/>
+              </a:ext>
+            </a:extLst>
+          </p:cNvPr>
+          <p:cNvSpPr>
+            <a:spLocks noGrp="1"/>
+          </p:cNvSpPr>
+          <p:nvPr>
+            <p:ph type="dt" sz="half" idx="10"/>
+          </p:nvPr>
+        </p:nvSpPr>
+        <p:spPr/>
+        <p:txBody>
+          <a:bodyPr/>
+          <a:lstStyle/>
+          <a:p>
+            <a:r>
+              <a:rPr lang="en-US"/>
+              <a:t>Vincenzo Gulisano</a:t>
+            </a:r>
+          </a:p>
+        </p:txBody>
+      </p:sp>
     </p:spTree>
     <p:extLst>
       <p:ext uri="{BB962C8B-B14F-4D97-AF65-F5344CB8AC3E}">
@@ -36791,6 +37732,34 @@
           </a:p>
         </p:txBody>
       </p:sp>
+      <p:sp>
+        <p:nvSpPr>
+          <p:cNvPr id="3" name="Date Placeholder 2">
+            <a:extLst>
+              <a:ext uri="{FF2B5EF4-FFF2-40B4-BE49-F238E27FC236}">
+                <a16:creationId xmlns:a16="http://schemas.microsoft.com/office/drawing/2014/main" id="{8F4D7D7C-51B2-4D21-A8E1-77B4443D4328}"/>
+              </a:ext>
+            </a:extLst>
+          </p:cNvPr>
+          <p:cNvSpPr>
+            <a:spLocks noGrp="1"/>
+          </p:cNvSpPr>
+          <p:nvPr>
+            <p:ph type="dt" sz="half" idx="10"/>
+          </p:nvPr>
+        </p:nvSpPr>
+        <p:spPr/>
+        <p:txBody>
+          <a:bodyPr/>
+          <a:lstStyle/>
+          <a:p>
+            <a:r>
+              <a:rPr lang="en-US"/>
+              <a:t>Vincenzo Gulisano</a:t>
+            </a:r>
+          </a:p>
+        </p:txBody>
+      </p:sp>
     </p:spTree>
     <p:extLst>
       <p:ext uri="{BB962C8B-B14F-4D97-AF65-F5344CB8AC3E}">
@@ -37550,6 +38519,34 @@
                 <a:prstClr val="black"/>
               </a:solidFill>
             </a:endParaRPr>
+          </a:p>
+        </p:txBody>
+      </p:sp>
+      <p:sp>
+        <p:nvSpPr>
+          <p:cNvPr id="5" name="Date Placeholder 4">
+            <a:extLst>
+              <a:ext uri="{FF2B5EF4-FFF2-40B4-BE49-F238E27FC236}">
+                <a16:creationId xmlns:a16="http://schemas.microsoft.com/office/drawing/2014/main" id="{9A102997-1980-D940-A5C6-044E2391E66F}"/>
+              </a:ext>
+            </a:extLst>
+          </p:cNvPr>
+          <p:cNvSpPr>
+            <a:spLocks noGrp="1"/>
+          </p:cNvSpPr>
+          <p:nvPr>
+            <p:ph type="dt" sz="half" idx="10"/>
+          </p:nvPr>
+        </p:nvSpPr>
+        <p:spPr/>
+        <p:txBody>
+          <a:bodyPr/>
+          <a:lstStyle/>
+          <a:p>
+            <a:r>
+              <a:rPr lang="en-US"/>
+              <a:t>Vincenzo Gulisano</a:t>
+            </a:r>
           </a:p>
         </p:txBody>
       </p:sp>
@@ -37989,6 +38986,34 @@
                 </a:schemeClr>
               </a:solidFill>
             </a:endParaRPr>
+          </a:p>
+        </p:txBody>
+      </p:sp>
+      <p:sp>
+        <p:nvSpPr>
+          <p:cNvPr id="2" name="Date Placeholder 1">
+            <a:extLst>
+              <a:ext uri="{FF2B5EF4-FFF2-40B4-BE49-F238E27FC236}">
+                <a16:creationId xmlns:a16="http://schemas.microsoft.com/office/drawing/2014/main" id="{44A9AABE-C72D-123A-1543-E3E82B43C4A5}"/>
+              </a:ext>
+            </a:extLst>
+          </p:cNvPr>
+          <p:cNvSpPr>
+            <a:spLocks noGrp="1"/>
+          </p:cNvSpPr>
+          <p:nvPr>
+            <p:ph type="dt" sz="half" idx="10"/>
+          </p:nvPr>
+        </p:nvSpPr>
+        <p:spPr/>
+        <p:txBody>
+          <a:bodyPr/>
+          <a:lstStyle/>
+          <a:p>
+            <a:r>
+              <a:rPr lang="en-US"/>
+              <a:t>Vincenzo Gulisano</a:t>
+            </a:r>
           </a:p>
         </p:txBody>
       </p:sp>
@@ -39651,6 +40676,34 @@
           </p:sp>
         </p:grpSp>
       </p:grpSp>
+      <p:sp>
+        <p:nvSpPr>
+          <p:cNvPr id="7" name="Date Placeholder 6">
+            <a:extLst>
+              <a:ext uri="{FF2B5EF4-FFF2-40B4-BE49-F238E27FC236}">
+                <a16:creationId xmlns:a16="http://schemas.microsoft.com/office/drawing/2014/main" id="{EAAB3A2B-50DC-CD5D-1D48-14498CD28355}"/>
+              </a:ext>
+            </a:extLst>
+          </p:cNvPr>
+          <p:cNvSpPr>
+            <a:spLocks noGrp="1"/>
+          </p:cNvSpPr>
+          <p:nvPr>
+            <p:ph type="dt" sz="half" idx="10"/>
+          </p:nvPr>
+        </p:nvSpPr>
+        <p:spPr/>
+        <p:txBody>
+          <a:bodyPr/>
+          <a:lstStyle/>
+          <a:p>
+            <a:r>
+              <a:rPr lang="en-US"/>
+              <a:t>Vincenzo Gulisano</a:t>
+            </a:r>
+          </a:p>
+        </p:txBody>
+      </p:sp>
     </p:spTree>
     <p:extLst>
       <p:ext uri="{BB962C8B-B14F-4D97-AF65-F5344CB8AC3E}">
@@ -40511,6 +41564,34 @@
           </a:p>
         </p:txBody>
       </p:sp>
+      <p:sp>
+        <p:nvSpPr>
+          <p:cNvPr id="3" name="Date Placeholder 2">
+            <a:extLst>
+              <a:ext uri="{FF2B5EF4-FFF2-40B4-BE49-F238E27FC236}">
+                <a16:creationId xmlns:a16="http://schemas.microsoft.com/office/drawing/2014/main" id="{91CB422F-DA8D-2FF1-2C6C-0718264A2A19}"/>
+              </a:ext>
+            </a:extLst>
+          </p:cNvPr>
+          <p:cNvSpPr>
+            <a:spLocks noGrp="1"/>
+          </p:cNvSpPr>
+          <p:nvPr>
+            <p:ph type="dt" sz="half" idx="10"/>
+          </p:nvPr>
+        </p:nvSpPr>
+        <p:spPr/>
+        <p:txBody>
+          <a:bodyPr/>
+          <a:lstStyle/>
+          <a:p>
+            <a:r>
+              <a:rPr lang="en-US"/>
+              <a:t>Vincenzo Gulisano</a:t>
+            </a:r>
+          </a:p>
+        </p:txBody>
+      </p:sp>
     </p:spTree>
     <p:extLst>
       <p:ext uri="{BB962C8B-B14F-4D97-AF65-F5344CB8AC3E}">
@@ -41077,7 +42158,7 @@
             <a:prstTxWarp prst="textNoShape">
               <a:avLst/>
             </a:prstTxWarp>
-            <a:normAutofit fontScale="92500"/>
+            <a:normAutofit/>
           </a:bodyPr>
           <a:lstStyle>
             <a:lvl1pPr algn="l" defTabSz="914400" rtl="0" eaLnBrk="1" latinLnBrk="0" hangingPunct="1">
@@ -42007,6 +43088,34 @@
           </a:p>
         </p:txBody>
       </p:sp>
+      <p:sp>
+        <p:nvSpPr>
+          <p:cNvPr id="3" name="Date Placeholder 2">
+            <a:extLst>
+              <a:ext uri="{FF2B5EF4-FFF2-40B4-BE49-F238E27FC236}">
+                <a16:creationId xmlns:a16="http://schemas.microsoft.com/office/drawing/2014/main" id="{B4B1F737-869A-D464-FD17-97F6FFD530E2}"/>
+              </a:ext>
+            </a:extLst>
+          </p:cNvPr>
+          <p:cNvSpPr>
+            <a:spLocks noGrp="1"/>
+          </p:cNvSpPr>
+          <p:nvPr>
+            <p:ph type="dt" sz="half" idx="10"/>
+          </p:nvPr>
+        </p:nvSpPr>
+        <p:spPr/>
+        <p:txBody>
+          <a:bodyPr/>
+          <a:lstStyle/>
+          <a:p>
+            <a:r>
+              <a:rPr lang="en-US"/>
+              <a:t>Vincenzo Gulisano</a:t>
+            </a:r>
+          </a:p>
+        </p:txBody>
+      </p:sp>
     </p:spTree>
     <p:extLst>
       <p:ext uri="{BB962C8B-B14F-4D97-AF65-F5344CB8AC3E}">
@@ -42259,6 +43368,34 @@
               <a:t>9</a:t>
             </a:fld>
             <a:endParaRPr lang="en-US"/>
+          </a:p>
+        </p:txBody>
+      </p:sp>
+      <p:sp>
+        <p:nvSpPr>
+          <p:cNvPr id="5" name="Date Placeholder 4">
+            <a:extLst>
+              <a:ext uri="{FF2B5EF4-FFF2-40B4-BE49-F238E27FC236}">
+                <a16:creationId xmlns:a16="http://schemas.microsoft.com/office/drawing/2014/main" id="{CC847F7F-C42F-17A2-EEA5-65F61DA5A838}"/>
+              </a:ext>
+            </a:extLst>
+          </p:cNvPr>
+          <p:cNvSpPr>
+            <a:spLocks noGrp="1"/>
+          </p:cNvSpPr>
+          <p:nvPr>
+            <p:ph type="dt" sz="half" idx="10"/>
+          </p:nvPr>
+        </p:nvSpPr>
+        <p:spPr/>
+        <p:txBody>
+          <a:bodyPr/>
+          <a:lstStyle/>
+          <a:p>
+            <a:r>
+              <a:rPr lang="en-US"/>
+              <a:t>Vincenzo Gulisano</a:t>
+            </a:r>
           </a:p>
         </p:txBody>
       </p:sp>

--- a/slides/synchronization_part_2.pptx
+++ b/slides/synchronization_part_2.pptx
@@ -477,7 +477,7 @@
           <a:p>
             <a:fld id="{B9670FC7-431C-3445-825C-360F18AD9FB0}" type="datetimeFigureOut">
               <a:rPr lang="en-US" smtClean="0"/>
-              <a:t>7/14/26</a:t>
+              <a:t>7/15/26</a:t>
             </a:fld>
             <a:endParaRPr lang="en-US"/>
           </a:p>
@@ -17421,30 +17421,7 @@
           <a:p>
             <a:r>
               <a:rPr lang="en-US" dirty="0"/>
-              <a:t>4</a:t>
-            </a:r>
-            <a:r>
-              <a:rPr lang="en-US" baseline="30000" dirty="0"/>
-              <a:t>th</a:t>
-            </a:r>
-            <a:r>
-              <a:rPr lang="en-US" dirty="0"/>
-              <a:t> edition</a:t>
-            </a:r>
-          </a:p>
-          <a:p>
-            <a:pPr lvl="1"/>
-            <a:r>
-              <a:rPr lang="en-US" dirty="0"/>
-              <a:t>Chapter 2.3.1-2.3.6, </a:t>
-            </a:r>
-            <a:r>
-              <a:rPr lang="en-GB" dirty="0"/>
-              <a:t>2.5.1-</a:t>
-            </a:r>
-            <a:r>
-              <a:rPr lang="en-US" dirty="0"/>
-              <a:t>2.5.2, </a:t>
+              <a:t>Chapter 2.4.1-2.4.6, </a:t>
             </a:r>
             <a:r>
               <a:rPr lang="en-GB" dirty="0"/>
@@ -17456,77 +17433,13 @@
             </a:r>
           </a:p>
           <a:p>
-            <a:pPr lvl="1"/>
-            <a:r>
-              <a:rPr lang="en-US" dirty="0"/>
-              <a:t>Quicker reading, for awareness, of sections 2.3.7-2.3.10, </a:t>
-            </a:r>
-            <a:r>
-              <a:rPr lang="en-GB" dirty="0"/>
-              <a:t>6.3</a:t>
-            </a:r>
-          </a:p>
-          <a:p>
-            <a:r>
-              <a:rPr lang="en-US" dirty="0"/>
-              <a:t>5</a:t>
-            </a:r>
-            <a:r>
-              <a:rPr lang="en-US" baseline="30000" dirty="0"/>
-              <a:t>th</a:t>
-            </a:r>
-            <a:r>
-              <a:rPr lang="en-US" dirty="0"/>
-              <a:t> edition</a:t>
-            </a:r>
-          </a:p>
-          <a:p>
-            <a:pPr lvl="1"/>
-            <a:r>
-              <a:rPr lang="en-US" dirty="0"/>
-              <a:t>Chapter 2.4.1-2.4.6, </a:t>
-            </a:r>
-            <a:r>
-              <a:rPr lang="en-GB" dirty="0"/>
-              <a:t>6.1-6.2, 6.5-6.6, 6.7.3-6.7.4</a:t>
-            </a:r>
-            <a:r>
-              <a:rPr lang="en-US" dirty="0"/>
-              <a:t>; </a:t>
-            </a:r>
-          </a:p>
-          <a:p>
-            <a:pPr lvl="1"/>
             <a:r>
               <a:rPr lang="en-US" dirty="0"/>
               <a:t>Quicker reading, for awareness, of sections 2.3.7-2.3.9, 2.3.11, </a:t>
             </a:r>
             <a:r>
-              <a:rPr lang="en-GB" dirty="0"/>
+              <a:rPr lang="en-GB"/>
               <a:t>6.3</a:t>
-            </a:r>
-            <a:br>
-              <a:rPr lang="en-US" dirty="0"/>
-            </a:br>
-            <a:br>
-              <a:rPr lang="en-US" dirty="0"/>
-            </a:br>
-            <a:br>
-              <a:rPr lang="en-US" dirty="0"/>
-            </a:br>
-            <a:endParaRPr lang="en-US" dirty="0"/>
-          </a:p>
-          <a:p>
-            <a:pPr marL="457200" lvl="1" indent="0">
-              <a:buNone/>
-            </a:pPr>
-            <a:r>
-              <a:rPr lang="en-US" dirty="0"/>
-              <a:t>(</a:t>
-            </a:r>
-            <a:r>
-              <a:rPr lang="en-GB" dirty="0"/>
-              <a:t>facultative reading: sections 6.1-6.7, 6.9, 7.1-7.5, 7.6-7.8 from OS Concepts by Silberschatz et-al).</a:t>
             </a:r>
             <a:endParaRPr lang="en-US" dirty="0"/>
           </a:p>
